--- a/黒崎/AI研修一覧/A-105_プロンプトの基本/スライド.pptx
+++ b/黒崎/AI研修一覧/A-105_プロンプトの基本/スライド.pptx
@@ -2149,14 +2149,16 @@
           <a:ln/>
         </p:spPr>
         <p:txBody>
-          <a:bodyPr wrap="square" lIns="0" tIns="0" rIns="0" bIns="0" rtlCol="0" anchor="ctr"/>
+          <a:bodyPr wrap="square" lIns="0" tIns="0" rIns="0" bIns="0" rtlCol="0" anchor="ctr">
+            <a:normAutofit/>
+          </a:bodyPr>
           <a:lstStyle/>
           <a:p>
             <a:pPr indent="0" marL="0">
               <a:buNone/>
             </a:pPr>
             <a:r>
-              <a:rPr lang="en-US" sz="3200" b="1" dirty="0">
+              <a:rPr lang="en-US" sz="2200" b="1" dirty="0">
                 <a:solidFill>
                   <a:srgbClr val="111827"/>
                 </a:solidFill>
@@ -2166,7 +2168,7 @@
               </a:rPr>
               <a:t>よくある失敗と改善テクニック</a:t>
             </a:r>
-            <a:endParaRPr lang="en-US" sz="3200" dirty="0"/>
+            <a:endParaRPr lang="en-US" sz="2200" dirty="0"/>
           </a:p>
         </p:txBody>
       </p:sp>
@@ -3090,14 +3092,16 @@
           <a:ln/>
         </p:spPr>
         <p:txBody>
-          <a:bodyPr wrap="square" lIns="0" tIns="0" rIns="0" bIns="0" rtlCol="0" anchor="ctr"/>
+          <a:bodyPr wrap="square" lIns="0" tIns="0" rIns="0" bIns="0" rtlCol="0" anchor="ctr">
+            <a:normAutofit/>
+          </a:bodyPr>
           <a:lstStyle/>
           <a:p>
             <a:pPr indent="0" marL="0">
               <a:buNone/>
             </a:pPr>
             <a:r>
-              <a:rPr lang="en-US" sz="3200" b="1" dirty="0">
+              <a:rPr lang="en-US" sz="2200" b="1" dirty="0">
                 <a:solidFill>
                   <a:srgbClr val="111827"/>
                 </a:solidFill>
@@ -3107,7 +3111,7 @@
               </a:rPr>
               <a:t>今日のまとめ</a:t>
             </a:r>
-            <a:endParaRPr lang="en-US" sz="3200" dirty="0"/>
+            <a:endParaRPr lang="en-US" sz="2200" dirty="0"/>
           </a:p>
         </p:txBody>
       </p:sp>
@@ -4197,14 +4201,16 @@
           <a:ln/>
         </p:spPr>
         <p:txBody>
-          <a:bodyPr wrap="square" lIns="0" tIns="0" rIns="0" bIns="0" rtlCol="0" anchor="ctr"/>
+          <a:bodyPr wrap="square" lIns="0" tIns="0" rIns="0" bIns="0" rtlCol="0" anchor="ctr">
+            <a:normAutofit/>
+          </a:bodyPr>
           <a:lstStyle/>
           <a:p>
             <a:pPr indent="0" marL="0">
               <a:buNone/>
             </a:pPr>
             <a:r>
-              <a:rPr lang="en-US" sz="3200" b="1" dirty="0">
+              <a:rPr lang="en-US" sz="2200" b="1" dirty="0">
                 <a:solidFill>
                   <a:srgbClr val="111827"/>
                 </a:solidFill>
@@ -4214,7 +4220,7 @@
               </a:rPr>
               <a:t>今日のゴール</a:t>
             </a:r>
-            <a:endParaRPr lang="en-US" sz="3200" dirty="0"/>
+            <a:endParaRPr lang="en-US" sz="2200" dirty="0"/>
           </a:p>
         </p:txBody>
       </p:sp>
@@ -4736,14 +4742,16 @@
           <a:ln/>
         </p:spPr>
         <p:txBody>
-          <a:bodyPr wrap="square" lIns="0" tIns="0" rIns="0" bIns="0" rtlCol="0" anchor="ctr"/>
+          <a:bodyPr wrap="square" lIns="0" tIns="0" rIns="0" bIns="0" rtlCol="0" anchor="ctr">
+            <a:normAutofit/>
+          </a:bodyPr>
           <a:lstStyle/>
           <a:p>
             <a:pPr indent="0" marL="0">
               <a:buNone/>
             </a:pPr>
             <a:r>
-              <a:rPr lang="en-US" sz="3200" b="1" dirty="0">
+              <a:rPr lang="en-US" sz="2200" b="1" dirty="0">
                 <a:solidFill>
                   <a:srgbClr val="111827"/>
                 </a:solidFill>
@@ -4753,7 +4761,7 @@
               </a:rPr>
               <a:t>プロンプトとは何か？</a:t>
             </a:r>
-            <a:endParaRPr lang="en-US" sz="3200" dirty="0"/>
+            <a:endParaRPr lang="en-US" sz="2200" dirty="0"/>
           </a:p>
         </p:txBody>
       </p:sp>
@@ -5806,14 +5814,16 @@
           <a:ln/>
         </p:spPr>
         <p:txBody>
-          <a:bodyPr wrap="square" lIns="0" tIns="0" rIns="0" bIns="0" rtlCol="0" anchor="ctr"/>
+          <a:bodyPr wrap="square" lIns="0" tIns="0" rIns="0" bIns="0" rtlCol="0" anchor="ctr">
+            <a:normAutofit/>
+          </a:bodyPr>
           <a:lstStyle/>
           <a:p>
             <a:pPr indent="0" marL="0">
               <a:buNone/>
             </a:pPr>
             <a:r>
-              <a:rPr lang="en-US" sz="3200" b="1" dirty="0">
+              <a:rPr lang="en-US" sz="2200" b="1" dirty="0">
                 <a:solidFill>
                   <a:srgbClr val="111827"/>
                 </a:solidFill>
@@ -5823,7 +5833,7 @@
               </a:rPr>
               <a:t>なぜAIの回答がイマイチなのか？</a:t>
             </a:r>
-            <a:endParaRPr lang="en-US" sz="3200" dirty="0"/>
+            <a:endParaRPr lang="en-US" sz="2200" dirty="0"/>
           </a:p>
         </p:txBody>
       </p:sp>
@@ -6544,14 +6554,16 @@
           <a:ln/>
         </p:spPr>
         <p:txBody>
-          <a:bodyPr wrap="square" lIns="0" tIns="0" rIns="0" bIns="0" rtlCol="0" anchor="ctr"/>
+          <a:bodyPr wrap="square" lIns="0" tIns="0" rIns="0" bIns="0" rtlCol="0" anchor="ctr">
+            <a:normAutofit/>
+          </a:bodyPr>
           <a:lstStyle/>
           <a:p>
             <a:pPr indent="0" marL="0">
               <a:buNone/>
             </a:pPr>
             <a:r>
-              <a:rPr lang="en-US" sz="3200" b="1" dirty="0">
+              <a:rPr lang="en-US" sz="2200" b="1" dirty="0">
                 <a:solidFill>
                   <a:srgbClr val="111827"/>
                 </a:solidFill>
@@ -6561,7 +6573,7 @@
               </a:rPr>
               <a:t>良いプロンプトの5つの要素</a:t>
             </a:r>
-            <a:endParaRPr lang="en-US" sz="3200" dirty="0"/>
+            <a:endParaRPr lang="en-US" sz="2200" dirty="0"/>
           </a:p>
         </p:txBody>
       </p:sp>
@@ -7927,14 +7939,16 @@
           <a:ln/>
         </p:spPr>
         <p:txBody>
-          <a:bodyPr wrap="square" lIns="0" tIns="0" rIns="0" bIns="0" rtlCol="0" anchor="ctr"/>
+          <a:bodyPr wrap="square" lIns="0" tIns="0" rIns="0" bIns="0" rtlCol="0" anchor="ctr">
+            <a:normAutofit/>
+          </a:bodyPr>
           <a:lstStyle/>
           <a:p>
             <a:pPr indent="0" marL="0">
               <a:buNone/>
             </a:pPr>
             <a:r>
-              <a:rPr lang="en-US" sz="3200" b="1" dirty="0">
+              <a:rPr lang="en-US" sz="2200" b="1" dirty="0">
                 <a:solidFill>
                   <a:srgbClr val="111827"/>
                 </a:solidFill>
@@ -7944,7 +7958,7 @@
               </a:rPr>
               <a:t>役割と文脈 — AIに「前提」を伝える</a:t>
             </a:r>
-            <a:endParaRPr lang="en-US" sz="3200" dirty="0"/>
+            <a:endParaRPr lang="en-US" sz="2200" dirty="0"/>
           </a:p>
         </p:txBody>
       </p:sp>
@@ -8922,14 +8936,16 @@
           <a:ln/>
         </p:spPr>
         <p:txBody>
-          <a:bodyPr wrap="square" lIns="0" tIns="0" rIns="0" bIns="0" rtlCol="0" anchor="ctr"/>
+          <a:bodyPr wrap="square" lIns="0" tIns="0" rIns="0" bIns="0" rtlCol="0" anchor="ctr">
+            <a:normAutofit/>
+          </a:bodyPr>
           <a:lstStyle/>
           <a:p>
             <a:pPr indent="0" marL="0">
               <a:buNone/>
             </a:pPr>
             <a:r>
-              <a:rPr lang="en-US" sz="3200" b="1" dirty="0">
+              <a:rPr lang="en-US" sz="2200" b="1" dirty="0">
                 <a:solidFill>
                   <a:srgbClr val="111827"/>
                 </a:solidFill>
@@ -8939,7 +8955,7 @@
               </a:rPr>
               <a:t>指示 — 「何をしてほしいか」を明確に</a:t>
             </a:r>
-            <a:endParaRPr lang="en-US" sz="3200" dirty="0"/>
+            <a:endParaRPr lang="en-US" sz="2200" dirty="0"/>
           </a:p>
         </p:txBody>
       </p:sp>
@@ -9938,14 +9954,16 @@
           <a:ln/>
         </p:spPr>
         <p:txBody>
-          <a:bodyPr wrap="square" lIns="0" tIns="0" rIns="0" bIns="0" rtlCol="0" anchor="ctr"/>
+          <a:bodyPr wrap="square" lIns="0" tIns="0" rIns="0" bIns="0" rtlCol="0" anchor="ctr">
+            <a:normAutofit/>
+          </a:bodyPr>
           <a:lstStyle/>
           <a:p>
             <a:pPr indent="0" marL="0">
               <a:buNone/>
             </a:pPr>
             <a:r>
-              <a:rPr lang="en-US" sz="3200" b="1" dirty="0">
+              <a:rPr lang="en-US" sz="2200" b="1" dirty="0">
                 <a:solidFill>
                   <a:srgbClr val="111827"/>
                 </a:solidFill>
@@ -9955,7 +9973,7 @@
               </a:rPr>
               <a:t>形式と制約 — アウトプットをコントロールする</a:t>
             </a:r>
-            <a:endParaRPr lang="en-US" sz="3200" dirty="0"/>
+            <a:endParaRPr lang="en-US" sz="2200" dirty="0"/>
           </a:p>
         </p:txBody>
       </p:sp>
@@ -10946,14 +10964,16 @@
           <a:ln/>
         </p:spPr>
         <p:txBody>
-          <a:bodyPr wrap="square" lIns="0" tIns="0" rIns="0" bIns="0" rtlCol="0" anchor="ctr"/>
+          <a:bodyPr wrap="square" lIns="0" tIns="0" rIns="0" bIns="0" rtlCol="0" anchor="ctr">
+            <a:normAutofit/>
+          </a:bodyPr>
           <a:lstStyle/>
           <a:p>
             <a:pPr indent="0" marL="0">
               <a:buNone/>
             </a:pPr>
             <a:r>
-              <a:rPr lang="en-US" sz="3200" b="1" dirty="0">
+              <a:rPr lang="en-US" sz="2200" b="1" dirty="0">
                 <a:solidFill>
                   <a:srgbClr val="111827"/>
                 </a:solidFill>
@@ -10963,7 +10983,7 @@
               </a:rPr>
               <a:t>実践！ Before → After</a:t>
             </a:r>
-            <a:endParaRPr lang="en-US" sz="3200" dirty="0"/>
+            <a:endParaRPr lang="en-US" sz="2200" dirty="0"/>
           </a:p>
         </p:txBody>
       </p:sp>
